--- a/Novosibirsk_State_University/Дипломная работа/Тематика.pptx
+++ b/Novosibirsk_State_University/Дипломная работа/Тематика.pptx
@@ -277,7 +277,7 @@
           <a:p>
             <a:fld id="{0EA0B553-31EF-4B1D-9EAB-410AD6CA89D0}" type="datetimeFigureOut">
               <a:rPr lang="ru-RU" smtClean="0"/>
-              <a:t>16.12.2025</a:t>
+              <a:t>18.12.2025</a:t>
             </a:fld>
             <a:endParaRPr lang="ru-RU"/>
           </a:p>
@@ -475,7 +475,7 @@
           <a:p>
             <a:fld id="{0EA0B553-31EF-4B1D-9EAB-410AD6CA89D0}" type="datetimeFigureOut">
               <a:rPr lang="ru-RU" smtClean="0"/>
-              <a:t>16.12.2025</a:t>
+              <a:t>18.12.2025</a:t>
             </a:fld>
             <a:endParaRPr lang="ru-RU"/>
           </a:p>
@@ -683,7 +683,7 @@
           <a:p>
             <a:fld id="{0EA0B553-31EF-4B1D-9EAB-410AD6CA89D0}" type="datetimeFigureOut">
               <a:rPr lang="ru-RU" smtClean="0"/>
-              <a:t>16.12.2025</a:t>
+              <a:t>18.12.2025</a:t>
             </a:fld>
             <a:endParaRPr lang="ru-RU"/>
           </a:p>
@@ -881,7 +881,7 @@
           <a:p>
             <a:fld id="{0EA0B553-31EF-4B1D-9EAB-410AD6CA89D0}" type="datetimeFigureOut">
               <a:rPr lang="ru-RU" smtClean="0"/>
-              <a:t>16.12.2025</a:t>
+              <a:t>18.12.2025</a:t>
             </a:fld>
             <a:endParaRPr lang="ru-RU"/>
           </a:p>
@@ -1156,7 +1156,7 @@
           <a:p>
             <a:fld id="{0EA0B553-31EF-4B1D-9EAB-410AD6CA89D0}" type="datetimeFigureOut">
               <a:rPr lang="ru-RU" smtClean="0"/>
-              <a:t>16.12.2025</a:t>
+              <a:t>18.12.2025</a:t>
             </a:fld>
             <a:endParaRPr lang="ru-RU"/>
           </a:p>
@@ -1421,7 +1421,7 @@
           <a:p>
             <a:fld id="{0EA0B553-31EF-4B1D-9EAB-410AD6CA89D0}" type="datetimeFigureOut">
               <a:rPr lang="ru-RU" smtClean="0"/>
-              <a:t>16.12.2025</a:t>
+              <a:t>18.12.2025</a:t>
             </a:fld>
             <a:endParaRPr lang="ru-RU"/>
           </a:p>
@@ -1833,7 +1833,7 @@
           <a:p>
             <a:fld id="{0EA0B553-31EF-4B1D-9EAB-410AD6CA89D0}" type="datetimeFigureOut">
               <a:rPr lang="ru-RU" smtClean="0"/>
-              <a:t>16.12.2025</a:t>
+              <a:t>18.12.2025</a:t>
             </a:fld>
             <a:endParaRPr lang="ru-RU"/>
           </a:p>
@@ -1974,7 +1974,7 @@
           <a:p>
             <a:fld id="{0EA0B553-31EF-4B1D-9EAB-410AD6CA89D0}" type="datetimeFigureOut">
               <a:rPr lang="ru-RU" smtClean="0"/>
-              <a:t>16.12.2025</a:t>
+              <a:t>18.12.2025</a:t>
             </a:fld>
             <a:endParaRPr lang="ru-RU"/>
           </a:p>
@@ -2087,7 +2087,7 @@
           <a:p>
             <a:fld id="{0EA0B553-31EF-4B1D-9EAB-410AD6CA89D0}" type="datetimeFigureOut">
               <a:rPr lang="ru-RU" smtClean="0"/>
-              <a:t>16.12.2025</a:t>
+              <a:t>18.12.2025</a:t>
             </a:fld>
             <a:endParaRPr lang="ru-RU"/>
           </a:p>
@@ -2398,7 +2398,7 @@
           <a:p>
             <a:fld id="{0EA0B553-31EF-4B1D-9EAB-410AD6CA89D0}" type="datetimeFigureOut">
               <a:rPr lang="ru-RU" smtClean="0"/>
-              <a:t>16.12.2025</a:t>
+              <a:t>18.12.2025</a:t>
             </a:fld>
             <a:endParaRPr lang="ru-RU"/>
           </a:p>
@@ -2686,7 +2686,7 @@
           <a:p>
             <a:fld id="{0EA0B553-31EF-4B1D-9EAB-410AD6CA89D0}" type="datetimeFigureOut">
               <a:rPr lang="ru-RU" smtClean="0"/>
-              <a:t>16.12.2025</a:t>
+              <a:t>18.12.2025</a:t>
             </a:fld>
             <a:endParaRPr lang="ru-RU"/>
           </a:p>
@@ -2927,7 +2927,7 @@
           <a:p>
             <a:fld id="{0EA0B553-31EF-4B1D-9EAB-410AD6CA89D0}" type="datetimeFigureOut">
               <a:rPr lang="ru-RU" smtClean="0"/>
-              <a:t>16.12.2025</a:t>
+              <a:t>18.12.2025</a:t>
             </a:fld>
             <a:endParaRPr lang="ru-RU"/>
           </a:p>
@@ -4381,7 +4381,7 @@
                 <a:latin typeface="Times New Roman" panose="02020603050405020304" pitchFamily="18" charset="0"/>
                 <a:cs typeface="Times New Roman" panose="02020603050405020304" pitchFamily="18" charset="0"/>
               </a:rPr>
-              <a:t>2. Будет разработано программное обеспечение, которое собирает сырые данные с осциллографа и измерителя энергии и сразу проводит их обработку с помощью двух независимых методов (интегрирование сигнала и аппроксимация спектра).</a:t>
+              <a:t>2. Будет разработано программное обеспечение, которое собирает данные с осциллографа и измерителя энергии и сразу проводит их обработку с помощью двух независимых методов для вычисления спектра и расчета зависимости энергии от интенсивности.</a:t>
             </a:r>
           </a:p>
           <a:p>
@@ -4405,8 +4405,19 @@
                 <a:latin typeface="Times New Roman" panose="02020603050405020304" pitchFamily="18" charset="0"/>
                 <a:cs typeface="Times New Roman" panose="02020603050405020304" pitchFamily="18" charset="0"/>
               </a:rPr>
-              <a:t>4. Будет протестировано ПО в реальных условиях эксперимента.</a:t>
-            </a:r>
+              <a:t>4. </a:t>
+            </a:r>
+            <a:r>
+              <a:rPr lang="ru-RU">
+                <a:latin typeface="Times New Roman" panose="02020603050405020304" pitchFamily="18" charset="0"/>
+                <a:cs typeface="Times New Roman" panose="02020603050405020304" pitchFamily="18" charset="0"/>
+              </a:rPr>
+              <a:t>Будет протестировано ПО в реальных условиях эксперимента.</a:t>
+            </a:r>
+            <a:endParaRPr lang="ru-RU" dirty="0">
+              <a:latin typeface="Times New Roman" panose="02020603050405020304" pitchFamily="18" charset="0"/>
+              <a:cs typeface="Times New Roman" panose="02020603050405020304" pitchFamily="18" charset="0"/>
+            </a:endParaRPr>
           </a:p>
         </p:txBody>
       </p:sp>

--- a/Novosibirsk_State_University/Дипломная работа/Тематика.pptx
+++ b/Novosibirsk_State_University/Дипломная работа/Тематика.pptx
@@ -11,7 +11,7 @@
     <p:sldId id="260" r:id="rId5"/>
     <p:sldId id="266" r:id="rId6"/>
     <p:sldId id="265" r:id="rId7"/>
-    <p:sldId id="258" r:id="rId8"/>
+    <p:sldId id="273" r:id="rId8"/>
   </p:sldIdLst>
   <p:sldSz cx="12192000" cy="6858000"/>
   <p:notesSz cx="6858000" cy="9144000"/>
@@ -277,7 +277,7 @@
           <a:p>
             <a:fld id="{0EA0B553-31EF-4B1D-9EAB-410AD6CA89D0}" type="datetimeFigureOut">
               <a:rPr lang="ru-RU" smtClean="0"/>
-              <a:t>18.12.2025</a:t>
+              <a:t>23.12.2025</a:t>
             </a:fld>
             <a:endParaRPr lang="ru-RU"/>
           </a:p>
@@ -475,7 +475,7 @@
           <a:p>
             <a:fld id="{0EA0B553-31EF-4B1D-9EAB-410AD6CA89D0}" type="datetimeFigureOut">
               <a:rPr lang="ru-RU" smtClean="0"/>
-              <a:t>18.12.2025</a:t>
+              <a:t>23.12.2025</a:t>
             </a:fld>
             <a:endParaRPr lang="ru-RU"/>
           </a:p>
@@ -683,7 +683,7 @@
           <a:p>
             <a:fld id="{0EA0B553-31EF-4B1D-9EAB-410AD6CA89D0}" type="datetimeFigureOut">
               <a:rPr lang="ru-RU" smtClean="0"/>
-              <a:t>18.12.2025</a:t>
+              <a:t>23.12.2025</a:t>
             </a:fld>
             <a:endParaRPr lang="ru-RU"/>
           </a:p>
@@ -881,7 +881,7 @@
           <a:p>
             <a:fld id="{0EA0B553-31EF-4B1D-9EAB-410AD6CA89D0}" type="datetimeFigureOut">
               <a:rPr lang="ru-RU" smtClean="0"/>
-              <a:t>18.12.2025</a:t>
+              <a:t>23.12.2025</a:t>
             </a:fld>
             <a:endParaRPr lang="ru-RU"/>
           </a:p>
@@ -1156,7 +1156,7 @@
           <a:p>
             <a:fld id="{0EA0B553-31EF-4B1D-9EAB-410AD6CA89D0}" type="datetimeFigureOut">
               <a:rPr lang="ru-RU" smtClean="0"/>
-              <a:t>18.12.2025</a:t>
+              <a:t>23.12.2025</a:t>
             </a:fld>
             <a:endParaRPr lang="ru-RU"/>
           </a:p>
@@ -1421,7 +1421,7 @@
           <a:p>
             <a:fld id="{0EA0B553-31EF-4B1D-9EAB-410AD6CA89D0}" type="datetimeFigureOut">
               <a:rPr lang="ru-RU" smtClean="0"/>
-              <a:t>18.12.2025</a:t>
+              <a:t>23.12.2025</a:t>
             </a:fld>
             <a:endParaRPr lang="ru-RU"/>
           </a:p>
@@ -1833,7 +1833,7 @@
           <a:p>
             <a:fld id="{0EA0B553-31EF-4B1D-9EAB-410AD6CA89D0}" type="datetimeFigureOut">
               <a:rPr lang="ru-RU" smtClean="0"/>
-              <a:t>18.12.2025</a:t>
+              <a:t>23.12.2025</a:t>
             </a:fld>
             <a:endParaRPr lang="ru-RU"/>
           </a:p>
@@ -1974,7 +1974,7 @@
           <a:p>
             <a:fld id="{0EA0B553-31EF-4B1D-9EAB-410AD6CA89D0}" type="datetimeFigureOut">
               <a:rPr lang="ru-RU" smtClean="0"/>
-              <a:t>18.12.2025</a:t>
+              <a:t>23.12.2025</a:t>
             </a:fld>
             <a:endParaRPr lang="ru-RU"/>
           </a:p>
@@ -2087,7 +2087,7 @@
           <a:p>
             <a:fld id="{0EA0B553-31EF-4B1D-9EAB-410AD6CA89D0}" type="datetimeFigureOut">
               <a:rPr lang="ru-RU" smtClean="0"/>
-              <a:t>18.12.2025</a:t>
+              <a:t>23.12.2025</a:t>
             </a:fld>
             <a:endParaRPr lang="ru-RU"/>
           </a:p>
@@ -2398,7 +2398,7 @@
           <a:p>
             <a:fld id="{0EA0B553-31EF-4B1D-9EAB-410AD6CA89D0}" type="datetimeFigureOut">
               <a:rPr lang="ru-RU" smtClean="0"/>
-              <a:t>18.12.2025</a:t>
+              <a:t>23.12.2025</a:t>
             </a:fld>
             <a:endParaRPr lang="ru-RU"/>
           </a:p>
@@ -2686,7 +2686,7 @@
           <a:p>
             <a:fld id="{0EA0B553-31EF-4B1D-9EAB-410AD6CA89D0}" type="datetimeFigureOut">
               <a:rPr lang="ru-RU" smtClean="0"/>
-              <a:t>18.12.2025</a:t>
+              <a:t>23.12.2025</a:t>
             </a:fld>
             <a:endParaRPr lang="ru-RU"/>
           </a:p>
@@ -2927,7 +2927,7 @@
           <a:p>
             <a:fld id="{0EA0B553-31EF-4B1D-9EAB-410AD6CA89D0}" type="datetimeFigureOut">
               <a:rPr lang="ru-RU" smtClean="0"/>
-              <a:t>18.12.2025</a:t>
+              <a:t>23.12.2025</a:t>
             </a:fld>
             <a:endParaRPr lang="ru-RU"/>
           </a:p>
@@ -3529,7 +3529,7 @@
                 <a:latin typeface="Times New Roman" panose="02020603050405020304" pitchFamily="18" charset="0"/>
                 <a:cs typeface="Times New Roman" panose="02020603050405020304" pitchFamily="18" charset="0"/>
               </a:rPr>
-              <a:t>Место:</a:t>
+              <a:t>Место прохождения практики:</a:t>
             </a:r>
             <a:r>
               <a:rPr lang="ru-RU" sz="1800" spc="150" dirty="0">
@@ -3701,7 +3701,13 @@
           <a:bodyPr anchor="t"/>
           <a:lstStyle/>
           <a:p>
-            <a:pPr marL="0" indent="0">
+            <a:pPr marL="0" indent="450000" defTabSz="900000">
+              <a:lnSpc>
+                <a:spcPct val="100000"/>
+              </a:lnSpc>
+              <a:spcBef>
+                <a:spcPts val="0"/>
+              </a:spcBef>
               <a:buNone/>
             </a:pPr>
             <a:r>
@@ -3919,7 +3925,13 @@
           <a:bodyPr anchor="ctr"/>
           <a:lstStyle/>
           <a:p>
-            <a:pPr marL="0" indent="0">
+            <a:pPr marL="0" indent="450000" defTabSz="900000">
+              <a:lnSpc>
+                <a:spcPct val="100000"/>
+              </a:lnSpc>
+              <a:spcBef>
+                <a:spcPts val="0"/>
+              </a:spcBef>
               <a:buNone/>
             </a:pPr>
             <a:r>
@@ -3945,7 +3957,13 @@
             </a:r>
           </a:p>
           <a:p>
-            <a:pPr marL="0" indent="0">
+            <a:pPr marL="0" indent="450000" defTabSz="900000">
+              <a:lnSpc>
+                <a:spcPct val="100000"/>
+              </a:lnSpc>
+              <a:spcBef>
+                <a:spcPts val="0"/>
+              </a:spcBef>
               <a:buNone/>
             </a:pPr>
             <a:r>
@@ -4053,7 +4071,13 @@
           </a:bodyPr>
           <a:lstStyle/>
           <a:p>
-            <a:pPr marL="0" indent="0">
+            <a:pPr marL="0" indent="450000" defTabSz="900000">
+              <a:lnSpc>
+                <a:spcPct val="100000"/>
+              </a:lnSpc>
+              <a:spcBef>
+                <a:spcPts val="0"/>
+              </a:spcBef>
               <a:buNone/>
             </a:pPr>
             <a:r>
@@ -4357,7 +4381,7 @@
         </p:spPr>
         <p:txBody>
           <a:bodyPr anchor="ctr">
-            <a:normAutofit/>
+            <a:normAutofit lnSpcReduction="10000"/>
           </a:bodyPr>
           <a:lstStyle/>
           <a:p>
@@ -4381,7 +4405,7 @@
                 <a:latin typeface="Times New Roman" panose="02020603050405020304" pitchFamily="18" charset="0"/>
                 <a:cs typeface="Times New Roman" panose="02020603050405020304" pitchFamily="18" charset="0"/>
               </a:rPr>
-              <a:t>2. Будет разработано программное обеспечение, которое собирает данные с осциллографа и измерителя энергии и сразу проводит их обработку с помощью двух независимых методов для вычисления спектра и расчета зависимости энергии от интенсивности.</a:t>
+              <a:t>2. Будет разработано программное обеспечение, которое собирает данные с осциллографа и измерителя энергии и сразу проводит их обработку с помощью двух независимых методов для вычисления спектра и расчета зависимости интенсивности сигнала от энергии лазерного импульса.</a:t>
             </a:r>
           </a:p>
           <a:p>
@@ -4405,19 +4429,8 @@
                 <a:latin typeface="Times New Roman" panose="02020603050405020304" pitchFamily="18" charset="0"/>
                 <a:cs typeface="Times New Roman" panose="02020603050405020304" pitchFamily="18" charset="0"/>
               </a:rPr>
-              <a:t>4. </a:t>
-            </a:r>
-            <a:r>
-              <a:rPr lang="ru-RU">
-                <a:latin typeface="Times New Roman" panose="02020603050405020304" pitchFamily="18" charset="0"/>
-                <a:cs typeface="Times New Roman" panose="02020603050405020304" pitchFamily="18" charset="0"/>
-              </a:rPr>
-              <a:t>Будет протестировано ПО в реальных условиях эксперимента.</a:t>
-            </a:r>
-            <a:endParaRPr lang="ru-RU" dirty="0">
-              <a:latin typeface="Times New Roman" panose="02020603050405020304" pitchFamily="18" charset="0"/>
-              <a:cs typeface="Times New Roman" panose="02020603050405020304" pitchFamily="18" charset="0"/>
-            </a:endParaRPr>
+              <a:t>4. Будет протестировано ПО в реальных условиях эксперимента.</a:t>
+            </a:r>
           </a:p>
         </p:txBody>
       </p:sp>
@@ -4636,7 +4649,7 @@
                 <a:latin typeface="Times New Roman" panose="02020603050405020304" pitchFamily="18" charset="0"/>
                 <a:cs typeface="Times New Roman" panose="02020603050405020304" pitchFamily="18" charset="0"/>
               </a:rPr>
-              <a:t>Место:</a:t>
+              <a:t>Место прохождения практики:</a:t>
             </a:r>
             <a:r>
               <a:rPr lang="ru-RU" sz="1800" spc="150" dirty="0">
@@ -4718,7 +4731,7 @@
     </p:spTree>
     <p:extLst>
       <p:ext uri="{BB962C8B-B14F-4D97-AF65-F5344CB8AC3E}">
-        <p14:creationId xmlns:p14="http://schemas.microsoft.com/office/powerpoint/2010/main" val="4223460131"/>
+        <p14:creationId xmlns:p14="http://schemas.microsoft.com/office/powerpoint/2010/main" val="294209795"/>
       </p:ext>
     </p:extLst>
   </p:cSld>

--- a/Novosibirsk_State_University/Дипломная работа/Тематика.pptx
+++ b/Novosibirsk_State_University/Дипломная работа/Тематика.pptx
@@ -4081,11 +4081,18 @@
               <a:buNone/>
             </a:pPr>
             <a:r>
+              <a:rPr lang="ru-RU">
+                <a:latin typeface="Times New Roman" panose="02020603050405020304" pitchFamily="18" charset="0"/>
+                <a:cs typeface="Times New Roman" panose="02020603050405020304" pitchFamily="18" charset="0"/>
+              </a:rPr>
+              <a:t>Уменьшить время </a:t>
+            </a:r>
+            <a:r>
               <a:rPr lang="ru-RU" dirty="0">
                 <a:latin typeface="Times New Roman" panose="02020603050405020304" pitchFamily="18" charset="0"/>
                 <a:cs typeface="Times New Roman" panose="02020603050405020304" pitchFamily="18" charset="0"/>
               </a:rPr>
-              <a:t>Уменьшить скорость проведения эксперимента по изучению механизмов генерации синглетного кислорода, увеличить точность вычислений.</a:t>
+              <a:t>проведения эксперимента по изучению механизмов генерации синглетного кислорода, увеличить точность вычислений.</a:t>
             </a:r>
           </a:p>
         </p:txBody>

--- a/Novosibirsk_State_University/Дипломная работа/Тематика.pptx
+++ b/Novosibirsk_State_University/Дипломная работа/Тематика.pptx
@@ -277,7 +277,7 @@
           <a:p>
             <a:fld id="{0EA0B553-31EF-4B1D-9EAB-410AD6CA89D0}" type="datetimeFigureOut">
               <a:rPr lang="ru-RU" smtClean="0"/>
-              <a:t>23.12.2025</a:t>
+              <a:t>17.02.2026</a:t>
             </a:fld>
             <a:endParaRPr lang="ru-RU"/>
           </a:p>
@@ -475,7 +475,7 @@
           <a:p>
             <a:fld id="{0EA0B553-31EF-4B1D-9EAB-410AD6CA89D0}" type="datetimeFigureOut">
               <a:rPr lang="ru-RU" smtClean="0"/>
-              <a:t>23.12.2025</a:t>
+              <a:t>17.02.2026</a:t>
             </a:fld>
             <a:endParaRPr lang="ru-RU"/>
           </a:p>
@@ -683,7 +683,7 @@
           <a:p>
             <a:fld id="{0EA0B553-31EF-4B1D-9EAB-410AD6CA89D0}" type="datetimeFigureOut">
               <a:rPr lang="ru-RU" smtClean="0"/>
-              <a:t>23.12.2025</a:t>
+              <a:t>17.02.2026</a:t>
             </a:fld>
             <a:endParaRPr lang="ru-RU"/>
           </a:p>
@@ -881,7 +881,7 @@
           <a:p>
             <a:fld id="{0EA0B553-31EF-4B1D-9EAB-410AD6CA89D0}" type="datetimeFigureOut">
               <a:rPr lang="ru-RU" smtClean="0"/>
-              <a:t>23.12.2025</a:t>
+              <a:t>17.02.2026</a:t>
             </a:fld>
             <a:endParaRPr lang="ru-RU"/>
           </a:p>
@@ -1156,7 +1156,7 @@
           <a:p>
             <a:fld id="{0EA0B553-31EF-4B1D-9EAB-410AD6CA89D0}" type="datetimeFigureOut">
               <a:rPr lang="ru-RU" smtClean="0"/>
-              <a:t>23.12.2025</a:t>
+              <a:t>17.02.2026</a:t>
             </a:fld>
             <a:endParaRPr lang="ru-RU"/>
           </a:p>
@@ -1421,7 +1421,7 @@
           <a:p>
             <a:fld id="{0EA0B553-31EF-4B1D-9EAB-410AD6CA89D0}" type="datetimeFigureOut">
               <a:rPr lang="ru-RU" smtClean="0"/>
-              <a:t>23.12.2025</a:t>
+              <a:t>17.02.2026</a:t>
             </a:fld>
             <a:endParaRPr lang="ru-RU"/>
           </a:p>
@@ -1833,7 +1833,7 @@
           <a:p>
             <a:fld id="{0EA0B553-31EF-4B1D-9EAB-410AD6CA89D0}" type="datetimeFigureOut">
               <a:rPr lang="ru-RU" smtClean="0"/>
-              <a:t>23.12.2025</a:t>
+              <a:t>17.02.2026</a:t>
             </a:fld>
             <a:endParaRPr lang="ru-RU"/>
           </a:p>
@@ -1974,7 +1974,7 @@
           <a:p>
             <a:fld id="{0EA0B553-31EF-4B1D-9EAB-410AD6CA89D0}" type="datetimeFigureOut">
               <a:rPr lang="ru-RU" smtClean="0"/>
-              <a:t>23.12.2025</a:t>
+              <a:t>17.02.2026</a:t>
             </a:fld>
             <a:endParaRPr lang="ru-RU"/>
           </a:p>
@@ -2087,7 +2087,7 @@
           <a:p>
             <a:fld id="{0EA0B553-31EF-4B1D-9EAB-410AD6CA89D0}" type="datetimeFigureOut">
               <a:rPr lang="ru-RU" smtClean="0"/>
-              <a:t>23.12.2025</a:t>
+              <a:t>17.02.2026</a:t>
             </a:fld>
             <a:endParaRPr lang="ru-RU"/>
           </a:p>
@@ -2398,7 +2398,7 @@
           <a:p>
             <a:fld id="{0EA0B553-31EF-4B1D-9EAB-410AD6CA89D0}" type="datetimeFigureOut">
               <a:rPr lang="ru-RU" smtClean="0"/>
-              <a:t>23.12.2025</a:t>
+              <a:t>17.02.2026</a:t>
             </a:fld>
             <a:endParaRPr lang="ru-RU"/>
           </a:p>
@@ -2686,7 +2686,7 @@
           <a:p>
             <a:fld id="{0EA0B553-31EF-4B1D-9EAB-410AD6CA89D0}" type="datetimeFigureOut">
               <a:rPr lang="ru-RU" smtClean="0"/>
-              <a:t>23.12.2025</a:t>
+              <a:t>17.02.2026</a:t>
             </a:fld>
             <a:endParaRPr lang="ru-RU"/>
           </a:p>
@@ -2927,7 +2927,7 @@
           <a:p>
             <a:fld id="{0EA0B553-31EF-4B1D-9EAB-410AD6CA89D0}" type="datetimeFigureOut">
               <a:rPr lang="ru-RU" smtClean="0"/>
-              <a:t>23.12.2025</a:t>
+              <a:t>17.02.2026</a:t>
             </a:fld>
             <a:endParaRPr lang="ru-RU"/>
           </a:p>
@@ -3832,6 +3832,45 @@
           </a:prstGeom>
         </p:spPr>
       </p:pic>
+      <p:sp>
+        <p:nvSpPr>
+          <p:cNvPr id="9" name="TextBox 8">
+            <a:extLst>
+              <a:ext uri="{FF2B5EF4-FFF2-40B4-BE49-F238E27FC236}">
+                <a16:creationId xmlns:a16="http://schemas.microsoft.com/office/drawing/2014/main" id="{4D912AC2-9FA4-4C68-8E7A-052EC0D44478}"/>
+              </a:ext>
+            </a:extLst>
+          </p:cNvPr>
+          <p:cNvSpPr txBox="1"/>
+          <p:nvPr/>
+        </p:nvSpPr>
+        <p:spPr>
+          <a:xfrm>
+            <a:off x="11832000" y="6498000"/>
+            <a:ext cx="360000" cy="360000"/>
+          </a:xfrm>
+          <a:prstGeom prst="rect">
+            <a:avLst/>
+          </a:prstGeom>
+          <a:noFill/>
+        </p:spPr>
+        <p:txBody>
+          <a:bodyPr wrap="none" rtlCol="0" anchor="ctr">
+            <a:spAutoFit/>
+          </a:bodyPr>
+          <a:lstStyle/>
+          <a:p>
+            <a:pPr algn="ctr"/>
+            <a:r>
+              <a:rPr lang="ru-RU" dirty="0">
+                <a:latin typeface="Times New Roman" panose="02020603050405020304" pitchFamily="18" charset="0"/>
+                <a:cs typeface="Times New Roman" panose="02020603050405020304" pitchFamily="18" charset="0"/>
+              </a:rPr>
+              <a:t>2</a:t>
+            </a:r>
+          </a:p>
+        </p:txBody>
+      </p:sp>
     </p:spTree>
     <p:extLst>
       <p:ext uri="{BB962C8B-B14F-4D97-AF65-F5344CB8AC3E}">
@@ -3976,6 +4015,45 @@
           </a:p>
         </p:txBody>
       </p:sp>
+      <p:sp>
+        <p:nvSpPr>
+          <p:cNvPr id="4" name="TextBox 3">
+            <a:extLst>
+              <a:ext uri="{FF2B5EF4-FFF2-40B4-BE49-F238E27FC236}">
+                <a16:creationId xmlns:a16="http://schemas.microsoft.com/office/drawing/2014/main" id="{7974943F-FFE7-425C-9511-A7C78B89F2E2}"/>
+              </a:ext>
+            </a:extLst>
+          </p:cNvPr>
+          <p:cNvSpPr txBox="1"/>
+          <p:nvPr/>
+        </p:nvSpPr>
+        <p:spPr>
+          <a:xfrm>
+            <a:off x="11832000" y="6498000"/>
+            <a:ext cx="360000" cy="360000"/>
+          </a:xfrm>
+          <a:prstGeom prst="rect">
+            <a:avLst/>
+          </a:prstGeom>
+          <a:noFill/>
+        </p:spPr>
+        <p:txBody>
+          <a:bodyPr wrap="none" rtlCol="0" anchor="ctr">
+            <a:spAutoFit/>
+          </a:bodyPr>
+          <a:lstStyle/>
+          <a:p>
+            <a:pPr algn="ctr"/>
+            <a:r>
+              <a:rPr lang="ru-RU" dirty="0">
+                <a:latin typeface="Times New Roman" panose="02020603050405020304" pitchFamily="18" charset="0"/>
+                <a:cs typeface="Times New Roman" panose="02020603050405020304" pitchFamily="18" charset="0"/>
+              </a:rPr>
+              <a:t>3</a:t>
+            </a:r>
+          </a:p>
+        </p:txBody>
+      </p:sp>
     </p:spTree>
     <p:extLst>
       <p:ext uri="{BB962C8B-B14F-4D97-AF65-F5344CB8AC3E}">
@@ -4125,6 +4203,45 @@
           </a:prstGeom>
         </p:spPr>
       </p:pic>
+      <p:sp>
+        <p:nvSpPr>
+          <p:cNvPr id="5" name="TextBox 4">
+            <a:extLst>
+              <a:ext uri="{FF2B5EF4-FFF2-40B4-BE49-F238E27FC236}">
+                <a16:creationId xmlns:a16="http://schemas.microsoft.com/office/drawing/2014/main" id="{138F85CF-AFB2-4120-82A1-1973C4725A47}"/>
+              </a:ext>
+            </a:extLst>
+          </p:cNvPr>
+          <p:cNvSpPr txBox="1"/>
+          <p:nvPr/>
+        </p:nvSpPr>
+        <p:spPr>
+          <a:xfrm>
+            <a:off x="11832000" y="6498000"/>
+            <a:ext cx="360000" cy="360000"/>
+          </a:xfrm>
+          <a:prstGeom prst="rect">
+            <a:avLst/>
+          </a:prstGeom>
+          <a:noFill/>
+        </p:spPr>
+        <p:txBody>
+          <a:bodyPr wrap="none" rtlCol="0" anchor="ctr">
+            <a:spAutoFit/>
+          </a:bodyPr>
+          <a:lstStyle/>
+          <a:p>
+            <a:pPr algn="ctr"/>
+            <a:r>
+              <a:rPr lang="ru-RU" dirty="0">
+                <a:latin typeface="Times New Roman" panose="02020603050405020304" pitchFamily="18" charset="0"/>
+                <a:cs typeface="Times New Roman" panose="02020603050405020304" pitchFamily="18" charset="0"/>
+              </a:rPr>
+              <a:t>4</a:t>
+            </a:r>
+          </a:p>
+        </p:txBody>
+      </p:sp>
     </p:spTree>
     <p:extLst>
       <p:ext uri="{BB962C8B-B14F-4D97-AF65-F5344CB8AC3E}">
@@ -4297,6 +4414,45 @@
           </a:p>
         </p:txBody>
       </p:sp>
+      <p:sp>
+        <p:nvSpPr>
+          <p:cNvPr id="4" name="TextBox 3">
+            <a:extLst>
+              <a:ext uri="{FF2B5EF4-FFF2-40B4-BE49-F238E27FC236}">
+                <a16:creationId xmlns:a16="http://schemas.microsoft.com/office/drawing/2014/main" id="{5253369A-29E8-4664-BDC0-5F5B19198412}"/>
+              </a:ext>
+            </a:extLst>
+          </p:cNvPr>
+          <p:cNvSpPr txBox="1"/>
+          <p:nvPr/>
+        </p:nvSpPr>
+        <p:spPr>
+          <a:xfrm>
+            <a:off x="11832000" y="6498000"/>
+            <a:ext cx="360000" cy="360000"/>
+          </a:xfrm>
+          <a:prstGeom prst="rect">
+            <a:avLst/>
+          </a:prstGeom>
+          <a:noFill/>
+        </p:spPr>
+        <p:txBody>
+          <a:bodyPr wrap="none" rtlCol="0" anchor="ctr">
+            <a:spAutoFit/>
+          </a:bodyPr>
+          <a:lstStyle/>
+          <a:p>
+            <a:pPr algn="ctr"/>
+            <a:r>
+              <a:rPr lang="ru-RU" dirty="0">
+                <a:latin typeface="Times New Roman" panose="02020603050405020304" pitchFamily="18" charset="0"/>
+                <a:cs typeface="Times New Roman" panose="02020603050405020304" pitchFamily="18" charset="0"/>
+              </a:rPr>
+              <a:t>5</a:t>
+            </a:r>
+          </a:p>
+        </p:txBody>
+      </p:sp>
     </p:spTree>
     <p:extLst>
       <p:ext uri="{BB962C8B-B14F-4D97-AF65-F5344CB8AC3E}">
@@ -4437,6 +4593,45 @@
                 <a:cs typeface="Times New Roman" panose="02020603050405020304" pitchFamily="18" charset="0"/>
               </a:rPr>
               <a:t>4. Будет протестировано ПО в реальных условиях эксперимента.</a:t>
+            </a:r>
+          </a:p>
+        </p:txBody>
+      </p:sp>
+      <p:sp>
+        <p:nvSpPr>
+          <p:cNvPr id="4" name="TextBox 3">
+            <a:extLst>
+              <a:ext uri="{FF2B5EF4-FFF2-40B4-BE49-F238E27FC236}">
+                <a16:creationId xmlns:a16="http://schemas.microsoft.com/office/drawing/2014/main" id="{81BFE8D5-91E9-416F-9CCB-F4DC9EA6BA78}"/>
+              </a:ext>
+            </a:extLst>
+          </p:cNvPr>
+          <p:cNvSpPr txBox="1"/>
+          <p:nvPr/>
+        </p:nvSpPr>
+        <p:spPr>
+          <a:xfrm>
+            <a:off x="11832000" y="6498000"/>
+            <a:ext cx="360000" cy="360000"/>
+          </a:xfrm>
+          <a:prstGeom prst="rect">
+            <a:avLst/>
+          </a:prstGeom>
+          <a:noFill/>
+        </p:spPr>
+        <p:txBody>
+          <a:bodyPr wrap="none" rtlCol="0" anchor="ctr">
+            <a:spAutoFit/>
+          </a:bodyPr>
+          <a:lstStyle/>
+          <a:p>
+            <a:pPr algn="ctr"/>
+            <a:r>
+              <a:rPr lang="ru-RU" dirty="0">
+                <a:latin typeface="Times New Roman" panose="02020603050405020304" pitchFamily="18" charset="0"/>
+                <a:cs typeface="Times New Roman" panose="02020603050405020304" pitchFamily="18" charset="0"/>
+              </a:rPr>
+              <a:t>6</a:t>
             </a:r>
           </a:p>
         </p:txBody>

--- a/Novosibirsk_State_University/Дипломная работа/Тематика.pptx
+++ b/Novosibirsk_State_University/Дипломная работа/Тематика.pptx
@@ -277,7 +277,7 @@
           <a:p>
             <a:fld id="{0EA0B553-31EF-4B1D-9EAB-410AD6CA89D0}" type="datetimeFigureOut">
               <a:rPr lang="ru-RU" smtClean="0"/>
-              <a:t>17.02.2026</a:t>
+              <a:t>24.02.2026</a:t>
             </a:fld>
             <a:endParaRPr lang="ru-RU"/>
           </a:p>
@@ -475,7 +475,7 @@
           <a:p>
             <a:fld id="{0EA0B553-31EF-4B1D-9EAB-410AD6CA89D0}" type="datetimeFigureOut">
               <a:rPr lang="ru-RU" smtClean="0"/>
-              <a:t>17.02.2026</a:t>
+              <a:t>24.02.2026</a:t>
             </a:fld>
             <a:endParaRPr lang="ru-RU"/>
           </a:p>
@@ -683,7 +683,7 @@
           <a:p>
             <a:fld id="{0EA0B553-31EF-4B1D-9EAB-410AD6CA89D0}" type="datetimeFigureOut">
               <a:rPr lang="ru-RU" smtClean="0"/>
-              <a:t>17.02.2026</a:t>
+              <a:t>24.02.2026</a:t>
             </a:fld>
             <a:endParaRPr lang="ru-RU"/>
           </a:p>
@@ -881,7 +881,7 @@
           <a:p>
             <a:fld id="{0EA0B553-31EF-4B1D-9EAB-410AD6CA89D0}" type="datetimeFigureOut">
               <a:rPr lang="ru-RU" smtClean="0"/>
-              <a:t>17.02.2026</a:t>
+              <a:t>24.02.2026</a:t>
             </a:fld>
             <a:endParaRPr lang="ru-RU"/>
           </a:p>
@@ -1156,7 +1156,7 @@
           <a:p>
             <a:fld id="{0EA0B553-31EF-4B1D-9EAB-410AD6CA89D0}" type="datetimeFigureOut">
               <a:rPr lang="ru-RU" smtClean="0"/>
-              <a:t>17.02.2026</a:t>
+              <a:t>24.02.2026</a:t>
             </a:fld>
             <a:endParaRPr lang="ru-RU"/>
           </a:p>
@@ -1421,7 +1421,7 @@
           <a:p>
             <a:fld id="{0EA0B553-31EF-4B1D-9EAB-410AD6CA89D0}" type="datetimeFigureOut">
               <a:rPr lang="ru-RU" smtClean="0"/>
-              <a:t>17.02.2026</a:t>
+              <a:t>24.02.2026</a:t>
             </a:fld>
             <a:endParaRPr lang="ru-RU"/>
           </a:p>
@@ -1833,7 +1833,7 @@
           <a:p>
             <a:fld id="{0EA0B553-31EF-4B1D-9EAB-410AD6CA89D0}" type="datetimeFigureOut">
               <a:rPr lang="ru-RU" smtClean="0"/>
-              <a:t>17.02.2026</a:t>
+              <a:t>24.02.2026</a:t>
             </a:fld>
             <a:endParaRPr lang="ru-RU"/>
           </a:p>
@@ -1974,7 +1974,7 @@
           <a:p>
             <a:fld id="{0EA0B553-31EF-4B1D-9EAB-410AD6CA89D0}" type="datetimeFigureOut">
               <a:rPr lang="ru-RU" smtClean="0"/>
-              <a:t>17.02.2026</a:t>
+              <a:t>24.02.2026</a:t>
             </a:fld>
             <a:endParaRPr lang="ru-RU"/>
           </a:p>
@@ -2087,7 +2087,7 @@
           <a:p>
             <a:fld id="{0EA0B553-31EF-4B1D-9EAB-410AD6CA89D0}" type="datetimeFigureOut">
               <a:rPr lang="ru-RU" smtClean="0"/>
-              <a:t>17.02.2026</a:t>
+              <a:t>24.02.2026</a:t>
             </a:fld>
             <a:endParaRPr lang="ru-RU"/>
           </a:p>
@@ -2398,7 +2398,7 @@
           <a:p>
             <a:fld id="{0EA0B553-31EF-4B1D-9EAB-410AD6CA89D0}" type="datetimeFigureOut">
               <a:rPr lang="ru-RU" smtClean="0"/>
-              <a:t>17.02.2026</a:t>
+              <a:t>24.02.2026</a:t>
             </a:fld>
             <a:endParaRPr lang="ru-RU"/>
           </a:p>
@@ -2686,7 +2686,7 @@
           <a:p>
             <a:fld id="{0EA0B553-31EF-4B1D-9EAB-410AD6CA89D0}" type="datetimeFigureOut">
               <a:rPr lang="ru-RU" smtClean="0"/>
-              <a:t>17.02.2026</a:t>
+              <a:t>24.02.2026</a:t>
             </a:fld>
             <a:endParaRPr lang="ru-RU"/>
           </a:p>
@@ -2927,7 +2927,7 @@
           <a:p>
             <a:fld id="{0EA0B553-31EF-4B1D-9EAB-410AD6CA89D0}" type="datetimeFigureOut">
               <a:rPr lang="ru-RU" smtClean="0"/>
-              <a:t>17.02.2026</a:t>
+              <a:t>24.02.2026</a:t>
             </a:fld>
             <a:endParaRPr lang="ru-RU"/>
           </a:p>
@@ -3701,7 +3701,7 @@
           <a:bodyPr anchor="t"/>
           <a:lstStyle/>
           <a:p>
-            <a:pPr marL="0" indent="450000" defTabSz="900000">
+            <a:pPr marL="0" indent="450000" algn="just" defTabSz="900000">
               <a:lnSpc>
                 <a:spcPct val="100000"/>
               </a:lnSpc>
@@ -3964,7 +3964,7 @@
           <a:bodyPr anchor="ctr"/>
           <a:lstStyle/>
           <a:p>
-            <a:pPr marL="0" indent="450000" defTabSz="900000">
+            <a:pPr marL="0" indent="450000" algn="just" defTabSz="900000">
               <a:lnSpc>
                 <a:spcPct val="100000"/>
               </a:lnSpc>
@@ -3996,7 +3996,7 @@
             </a:r>
           </a:p>
           <a:p>
-            <a:pPr marL="0" indent="450000" defTabSz="900000">
+            <a:pPr marL="0" indent="450000" algn="just" defTabSz="900000">
               <a:lnSpc>
                 <a:spcPct val="100000"/>
               </a:lnSpc>
@@ -4149,7 +4149,7 @@
           </a:bodyPr>
           <a:lstStyle/>
           <a:p>
-            <a:pPr marL="0" indent="450000" defTabSz="900000">
+            <a:pPr marL="0" indent="450000" algn="just" defTabSz="900000">
               <a:lnSpc>
                 <a:spcPct val="100000"/>
               </a:lnSpc>
@@ -4159,18 +4159,11 @@
               <a:buNone/>
             </a:pPr>
             <a:r>
-              <a:rPr lang="ru-RU">
-                <a:latin typeface="Times New Roman" panose="02020603050405020304" pitchFamily="18" charset="0"/>
-                <a:cs typeface="Times New Roman" panose="02020603050405020304" pitchFamily="18" charset="0"/>
-              </a:rPr>
-              <a:t>Уменьшить время </a:t>
-            </a:r>
-            <a:r>
               <a:rPr lang="ru-RU" dirty="0">
                 <a:latin typeface="Times New Roman" panose="02020603050405020304" pitchFamily="18" charset="0"/>
                 <a:cs typeface="Times New Roman" panose="02020603050405020304" pitchFamily="18" charset="0"/>
               </a:rPr>
-              <a:t>проведения эксперимента по изучению механизмов генерации синглетного кислорода, увеличить точность вычислений.</a:t>
+              <a:t>Уменьшить время проведения эксперимента по изучению механизмов генерации синглетного кислорода, увеличить точность вычислений.</a:t>
             </a:r>
           </a:p>
         </p:txBody>
@@ -4337,7 +4330,7 @@
           </a:bodyPr>
           <a:lstStyle/>
           <a:p>
-            <a:pPr marL="0" indent="0">
+            <a:pPr marL="0" indent="0" algn="just">
               <a:buNone/>
             </a:pPr>
             <a:r>
@@ -4349,7 +4342,7 @@
             </a:r>
           </a:p>
           <a:p>
-            <a:pPr marL="0" indent="0">
+            <a:pPr marL="0" indent="0" algn="just">
               <a:buNone/>
             </a:pPr>
             <a:r>
@@ -4361,7 +4354,7 @@
             </a:r>
           </a:p>
           <a:p>
-            <a:pPr marL="0" indent="0">
+            <a:pPr marL="0" indent="0" algn="just">
               <a:buNone/>
             </a:pPr>
             <a:r>
@@ -4401,7 +4394,7 @@
             </a:r>
           </a:p>
           <a:p>
-            <a:pPr marL="0" indent="0">
+            <a:pPr marL="0" indent="0" algn="just">
               <a:buNone/>
             </a:pPr>
             <a:r>
@@ -4548,7 +4541,7 @@
           </a:bodyPr>
           <a:lstStyle/>
           <a:p>
-            <a:pPr marL="0" indent="0">
+            <a:pPr marL="0" indent="0" algn="just">
               <a:buNone/>
             </a:pPr>
             <a:r>
@@ -4560,7 +4553,7 @@
             </a:r>
           </a:p>
           <a:p>
-            <a:pPr marL="0" indent="0">
+            <a:pPr marL="0" indent="0" algn="just">
               <a:buNone/>
             </a:pPr>
             <a:r>
@@ -4572,7 +4565,7 @@
             </a:r>
           </a:p>
           <a:p>
-            <a:pPr marL="0" indent="0">
+            <a:pPr marL="0" indent="0" algn="just">
               <a:buNone/>
             </a:pPr>
             <a:r>
@@ -4584,7 +4577,7 @@
             </a:r>
           </a:p>
           <a:p>
-            <a:pPr marL="0" indent="0">
+            <a:pPr marL="0" indent="0" algn="just">
               <a:buNone/>
             </a:pPr>
             <a:r>
